--- a/classes/parte-1-redes-y-seguridad-de-redes/034-firewalls-tipos-iptables-y-nftables/clase-034-presentacion.pptx
+++ b/classes/parte-1-redes-y-seguridad-de-redes/034-firewalls-tipos-iptables-y-nftables/clase-034-presentacion.pptx
@@ -18,6 +18,9 @@
     <p:sldId id="266" r:id="rId17"/>
     <p:sldId id="267" r:id="rId18"/>
     <p:sldId id="268" r:id="rId19"/>
+    <p:sldId id="269" r:id="rId20"/>
+    <p:sldId id="270" r:id="rId21"/>
+    <p:sldId id="271" r:id="rId22"/>
   </p:sldIdLst>
   <p:sldSz cx="9144000" cy="6858000" type="screen4x3"/>
   <p:notesSz cx="6858000" cy="9144000"/>
@@ -3199,7 +3202,7 @@
                   <a:srgbClr val="0B3D2E"/>
                 </a:solidFill>
               </a:rPr>
-              <a:t>📝 Reto verificable</a:t>
+              <a:t>🧪 Laboratorio guiado — nftables</a:t>
             </a:r>
           </a:p>
         </p:txBody>
@@ -3237,22 +3240,37 @@
                   <a:srgbClr val="22282E"/>
                 </a:solidFill>
               </a:rPr>
-              <a:t>•  Configura en una VM un firewall stateful con política por defecto-denegar en INPUT que permita: loopback, conexiones establecidas, SSH solo desde tu subred de laboratorio y HTTP desde cualquier origen; registra y descarta el resto. Entrega el ruleset (nft list ruleset o iptables-save) y una evidencia de que un escaneo Nmap externo solo ve los puertos permitidos.</a:t>
-            </a:r>
-          </a:p>
-          <a:p>
-            <a:pPr>
-              <a:spcAft>
-                <a:spcPts val="600"/>
-              </a:spcAft>
-            </a:pPr>
-            <a:r>
-              <a:rPr sz="1500">
-                <a:solidFill>
-                  <a:srgbClr val="22282E"/>
-                </a:solidFill>
-              </a:rPr>
-              <a:t>•  Criterio de aceptación: desde otra VM, nmap -Pn muestra 22 (solo desde la subred autorizada) y 80 abiertos y el resto filtered; los intentos denegados aparecen en el log del kernel.</a:t>
+              <a:t>•  Crear tabla y cadena con política drop:</a:t>
+            </a:r>
+          </a:p>
+          <a:p>
+            <a:pPr>
+              <a:spcAft>
+                <a:spcPts val="600"/>
+              </a:spcAft>
+            </a:pPr>
+            <a:r>
+              <a:rPr sz="1500">
+                <a:solidFill>
+                  <a:srgbClr val="22282E"/>
+                </a:solidFill>
+              </a:rPr>
+              <a:t>•  Reglas equivalentes:</a:t>
+            </a:r>
+          </a:p>
+          <a:p>
+            <a:pPr>
+              <a:spcAft>
+                <a:spcPts val="600"/>
+              </a:spcAft>
+            </a:pPr>
+            <a:r>
+              <a:rPr sz="1500">
+                <a:solidFill>
+                  <a:srgbClr val="22282E"/>
+                </a:solidFill>
+              </a:rPr>
+              <a:t>•  Ver el ruleset y persistir:</a:t>
             </a:r>
           </a:p>
         </p:txBody>
@@ -3303,7 +3321,7 @@
                   <a:srgbClr val="0B3D2E"/>
                 </a:solidFill>
               </a:rPr>
-              <a:t>⚠️ Errores comunes</a:t>
+              <a:t>✍️ Ejercicios</a:t>
             </a:r>
           </a:p>
         </p:txBody>
@@ -3341,67 +3359,82 @@
                   <a:srgbClr val="22282E"/>
                 </a:solidFill>
               </a:rPr>
-              <a:t>•  Te quedas sin SSH al aplicar -P INPUT DROP — No permitiste established/SSH antes de la política; añade esas reglas primero y usa un at de rescate</a:t>
-            </a:r>
-          </a:p>
-          <a:p>
-            <a:pPr>
-              <a:spcAft>
-                <a:spcPts val="600"/>
-              </a:spcAft>
-            </a:pPr>
-            <a:r>
-              <a:rPr sz="1500">
-                <a:solidFill>
-                  <a:srgbClr val="22282E"/>
-                </a:solidFill>
-              </a:rPr>
-              <a:t>•  Reglas se pierden al reiniciar — No persististe; usa netfilter-persistent save o /etc/nftables.conf</a:t>
-            </a:r>
-          </a:p>
-          <a:p>
-            <a:pPr>
-              <a:spcAft>
-                <a:spcPts val="600"/>
-              </a:spcAft>
-            </a:pPr>
-            <a:r>
-              <a:rPr sz="1500">
-                <a:solidFill>
-                  <a:srgbClr val="22282E"/>
-                </a:solidFill>
-              </a:rPr>
-              <a:t>•  El orden de las reglas no funciona — Las cadenas se evalúan de arriba a abajo; coloca los ACCEPT específicos antes del DROP general</a:t>
-            </a:r>
-          </a:p>
-          <a:p>
-            <a:pPr>
-              <a:spcAft>
-                <a:spcPts val="600"/>
-              </a:spcAft>
-            </a:pPr>
-            <a:r>
-              <a:rPr sz="1500">
-                <a:solidFill>
-                  <a:srgbClr val="22282E"/>
-                </a:solidFill>
-              </a:rPr>
-              <a:t>•  iptables y nftables se pisan — Ambos activos a la vez; en sistemas modernos usa solo nftables (iptables suele ser el backend nft)</a:t>
-            </a:r>
-          </a:p>
-          <a:p>
-            <a:pPr>
-              <a:spcAft>
-                <a:spcPts val="600"/>
-              </a:spcAft>
-            </a:pPr>
-            <a:r>
-              <a:rPr sz="1500">
-                <a:solidFill>
-                  <a:srgbClr val="22282E"/>
-                </a:solidFill>
-              </a:rPr>
-              <a:t>•  Logging llena el disco — Sin límite de tasa en LOG; añade -m limit --limit 5/min</a:t>
+              <a:t>•  Escribe una política por defecto-denegar que solo permita SSH desde una subred concreta (-s 192.168.56.0/24).</a:t>
+            </a:r>
+          </a:p>
+          <a:p>
+            <a:pPr>
+              <a:spcAft>
+                <a:spcPts val="600"/>
+              </a:spcAft>
+            </a:pPr>
+            <a:r>
+              <a:rPr sz="1500">
+                <a:solidFill>
+                  <a:srgbClr val="22282E"/>
+                </a:solidFill>
+              </a:rPr>
+              <a:t>•  Añade una regla que limite la tasa de nuevas conexiones SSH (-m limit o ct count) para mitigar fuerza bruta.</a:t>
+            </a:r>
+          </a:p>
+          <a:p>
+            <a:pPr>
+              <a:spcAft>
+                <a:spcPts val="600"/>
+              </a:spcAft>
+            </a:pPr>
+            <a:r>
+              <a:rPr sz="1500">
+                <a:solidFill>
+                  <a:srgbClr val="22282E"/>
+                </a:solidFill>
+              </a:rPr>
+              <a:t>•  Traduce tu conjunto de reglas de iptables a nftables y verifica que se comportan igual.</a:t>
+            </a:r>
+          </a:p>
+          <a:p>
+            <a:pPr>
+              <a:spcAft>
+                <a:spcPts val="600"/>
+              </a:spcAft>
+            </a:pPr>
+            <a:r>
+              <a:rPr sz="1500">
+                <a:solidFill>
+                  <a:srgbClr val="22282E"/>
+                </a:solidFill>
+              </a:rPr>
+              <a:t>•  Configura logging solo para paquetes denegados y localiza las entradas en journalctl -k.</a:t>
+            </a:r>
+          </a:p>
+          <a:p>
+            <a:pPr>
+              <a:spcAft>
+                <a:spcPts val="600"/>
+              </a:spcAft>
+            </a:pPr>
+            <a:r>
+              <a:rPr sz="1500">
+                <a:solidFill>
+                  <a:srgbClr val="22282E"/>
+                </a:solidFill>
+              </a:rPr>
+              <a:t>•  Bloquea todo el tráfico saliente salvo DNS y HTTP/HTTPS (política OUTPUT restrictiva).</a:t>
+            </a:r>
+          </a:p>
+          <a:p>
+            <a:pPr>
+              <a:spcAft>
+                <a:spcPts val="600"/>
+              </a:spcAft>
+            </a:pPr>
+            <a:r>
+              <a:rPr sz="1500">
+                <a:solidFill>
+                  <a:srgbClr val="22282E"/>
+                </a:solidFill>
+              </a:rPr>
+              <a:t>•  Usa conntrack -E para observar en vivo la creación y cierre de conexiones.</a:t>
             </a:r>
           </a:p>
         </p:txBody>
@@ -3452,7 +3485,7 @@
                   <a:srgbClr val="0B3D2E"/>
                 </a:solidFill>
               </a:rPr>
-              <a:t>❓ Preguntas frecuentes</a:t>
+              <a:t>📝 Reto verificable</a:t>
             </a:r>
           </a:p>
         </p:txBody>
@@ -3490,97 +3523,22 @@
                   <a:srgbClr val="22282E"/>
                 </a:solidFill>
               </a:rPr>
-              <a:t>•  ❓ ¿iptables está obsoleto?</a:t>
-            </a:r>
-          </a:p>
-          <a:p>
-            <a:pPr>
-              <a:spcAft>
-                <a:spcPts val="600"/>
-              </a:spcAft>
-            </a:pPr>
-            <a:r>
-              <a:rPr sz="1500">
-                <a:solidFill>
-                  <a:srgbClr val="22282E"/>
-                </a:solidFill>
-              </a:rPr>
-              <a:t>•  Está siendo reemplazado por nftables, que es el framework recomendado. En muchas distros iptables ya es un frontend sobre nftables. Aprende ambos: verás iptables en sistemas heredados.</a:t>
-            </a:r>
-          </a:p>
-          <a:p>
-            <a:pPr>
-              <a:spcAft>
-                <a:spcPts val="600"/>
-              </a:spcAft>
-            </a:pPr>
-            <a:r>
-              <a:rPr sz="1500">
-                <a:solidFill>
-                  <a:srgbClr val="22282E"/>
-                </a:solidFill>
-              </a:rPr>
-              <a:t>•  ❓ ¿Qué es conntrack y por qué importa?</a:t>
-            </a:r>
-          </a:p>
-          <a:p>
-            <a:pPr>
-              <a:spcAft>
-                <a:spcPts val="600"/>
-              </a:spcAft>
-            </a:pPr>
-            <a:r>
-              <a:rPr sz="1500">
-                <a:solidFill>
-                  <a:srgbClr val="22282E"/>
-                </a:solidFill>
-              </a:rPr>
-              <a:t>•  Es el subsistema de seguimiento de conexiones. Permite escribir reglas simples ("permite lo establecido") en lugar de reglas espejo para cada dirección del tráfico.</a:t>
-            </a:r>
-          </a:p>
-          <a:p>
-            <a:pPr>
-              <a:spcAft>
-                <a:spcPts val="600"/>
-              </a:spcAft>
-            </a:pPr>
-            <a:r>
-              <a:rPr sz="1500">
-                <a:solidFill>
-                  <a:srgbClr val="22282E"/>
-                </a:solidFill>
-              </a:rPr>
-              <a:t>•  ❓ ¿Dónde va la política por defecto?</a:t>
-            </a:r>
-          </a:p>
-          <a:p>
-            <a:pPr>
-              <a:spcAft>
-                <a:spcPts val="600"/>
-              </a:spcAft>
-            </a:pPr>
-            <a:r>
-              <a:rPr sz="1500">
-                <a:solidFill>
-                  <a:srgbClr val="22282E"/>
-                </a:solidFill>
-              </a:rPr>
-              <a:t>•  Al final. Primero los ACCEPT específicos y las reglas de established; la última palabra es DROP para todo lo no permitido.</a:t>
-            </a:r>
-          </a:p>
-          <a:p>
-            <a:pPr>
-              <a:spcAft>
-                <a:spcPts val="600"/>
-              </a:spcAft>
-            </a:pPr>
-            <a:r>
-              <a:rPr sz="1500">
-                <a:solidFill>
-                  <a:srgbClr val="22282E"/>
-                </a:solidFill>
-              </a:rPr>
-              <a:t>•  ❓ ¿Un firewall de host reemplaza al perimetral?</a:t>
+              <a:t>•  Configura en una VM un firewall stateful con política por defecto-denegar en INPUT que permita: loopback, conexiones establecidas, SSH solo desde tu subred de laboratorio y HTTP desde cualquier…</a:t>
+            </a:r>
+          </a:p>
+          <a:p>
+            <a:pPr>
+              <a:spcAft>
+                <a:spcPts val="600"/>
+              </a:spcAft>
+            </a:pPr>
+            <a:r>
+              <a:rPr sz="1500">
+                <a:solidFill>
+                  <a:srgbClr val="22282E"/>
+                </a:solidFill>
+              </a:rPr>
+              <a:t>•  Criterio de aceptación: desde otra VM, nmap -Pn muestra 22 (solo desde la subred autorizada) y 80 abiertos y el resto filtered; los intentos denegados aparecen en el log del kernel.</a:t>
             </a:r>
           </a:p>
         </p:txBody>
@@ -3631,7 +3589,7 @@
                   <a:srgbClr val="0B3D2E"/>
                 </a:solidFill>
               </a:rPr>
-              <a:t>🔗 Referencias</a:t>
+              <a:t>⚠️ Errores comunes</a:t>
             </a:r>
           </a:p>
         </p:txBody>
@@ -3669,6 +3627,334 @@
                   <a:srgbClr val="22282E"/>
                 </a:solidFill>
               </a:rPr>
+              <a:t>•  Te quedas sin SSH al aplicar -P INPUT DROP — No permitiste established/SSH antes de la política; añade esas reglas primero y usa un at de rescate</a:t>
+            </a:r>
+          </a:p>
+          <a:p>
+            <a:pPr>
+              <a:spcAft>
+                <a:spcPts val="600"/>
+              </a:spcAft>
+            </a:pPr>
+            <a:r>
+              <a:rPr sz="1500">
+                <a:solidFill>
+                  <a:srgbClr val="22282E"/>
+                </a:solidFill>
+              </a:rPr>
+              <a:t>•  Reglas se pierden al reiniciar — No persististe; usa netfilter-persistent save o /etc/nftables.conf</a:t>
+            </a:r>
+          </a:p>
+          <a:p>
+            <a:pPr>
+              <a:spcAft>
+                <a:spcPts val="600"/>
+              </a:spcAft>
+            </a:pPr>
+            <a:r>
+              <a:rPr sz="1500">
+                <a:solidFill>
+                  <a:srgbClr val="22282E"/>
+                </a:solidFill>
+              </a:rPr>
+              <a:t>•  El orden de las reglas no funciona — Las cadenas se evalúan de arriba a abajo; coloca los ACCEPT específicos antes del DROP general</a:t>
+            </a:r>
+          </a:p>
+          <a:p>
+            <a:pPr>
+              <a:spcAft>
+                <a:spcPts val="600"/>
+              </a:spcAft>
+            </a:pPr>
+            <a:r>
+              <a:rPr sz="1500">
+                <a:solidFill>
+                  <a:srgbClr val="22282E"/>
+                </a:solidFill>
+              </a:rPr>
+              <a:t>•  iptables y nftables se pisan — Ambos activos a la vez; en sistemas modernos usa solo nftables (iptables suele ser el backend nft)</a:t>
+            </a:r>
+          </a:p>
+          <a:p>
+            <a:pPr>
+              <a:spcAft>
+                <a:spcPts val="600"/>
+              </a:spcAft>
+            </a:pPr>
+            <a:r>
+              <a:rPr sz="1500">
+                <a:solidFill>
+                  <a:srgbClr val="22282E"/>
+                </a:solidFill>
+              </a:rPr>
+              <a:t>•  Logging llena el disco — Sin límite de tasa en LOG; añade -m limit --limit 5/min</a:t>
+            </a:r>
+          </a:p>
+        </p:txBody>
+      </p:sp>
+    </p:spTree>
+  </p:cSld>
+  <p:clrMapOvr>
+    <a:masterClrMapping/>
+  </p:clrMapOvr>
+</p:sld>
+</file>
+
+<file path=ppt/slides/slide14.xml><?xml version="1.0" encoding="utf-8"?>
+<p:sld xmlns:a="http://schemas.openxmlformats.org/drawingml/2006/main" xmlns:p="http://schemas.openxmlformats.org/presentationml/2006/main" xmlns:r="http://schemas.openxmlformats.org/officeDocument/2006/relationships">
+  <p:cSld>
+    <p:spTree>
+      <p:nvGrpSpPr>
+        <p:cNvPr id="1" name=""/>
+        <p:cNvGrpSpPr/>
+        <p:nvPr/>
+      </p:nvGrpSpPr>
+      <p:grpSpPr/>
+      <p:sp>
+        <p:nvSpPr>
+          <p:cNvPr id="2" name="TextBox 1"/>
+          <p:cNvSpPr txBox="1"/>
+          <p:nvPr/>
+        </p:nvSpPr>
+        <p:spPr>
+          <a:xfrm>
+            <a:off x="457200" y="320040"/>
+            <a:ext cx="8229600" cy="822960"/>
+          </a:xfrm>
+          <a:prstGeom prst="rect">
+            <a:avLst/>
+          </a:prstGeom>
+          <a:noFill/>
+        </p:spPr>
+        <p:txBody>
+          <a:bodyPr wrap="square">
+            <a:spAutoFit/>
+          </a:bodyPr>
+          <a:lstStyle/>
+          <a:p>
+            <a:r>
+              <a:rPr sz="2600" b="1">
+                <a:solidFill>
+                  <a:srgbClr val="0B3D2E"/>
+                </a:solidFill>
+              </a:rPr>
+              <a:t>❓ Preguntas frecuentes</a:t>
+            </a:r>
+          </a:p>
+        </p:txBody>
+      </p:sp>
+      <p:sp>
+        <p:nvSpPr>
+          <p:cNvPr id="3" name="TextBox 2"/>
+          <p:cNvSpPr txBox="1"/>
+          <p:nvPr/>
+        </p:nvSpPr>
+        <p:spPr>
+          <a:xfrm>
+            <a:off x="457200" y="1280160"/>
+            <a:ext cx="8229600" cy="4937760"/>
+          </a:xfrm>
+          <a:prstGeom prst="rect">
+            <a:avLst/>
+          </a:prstGeom>
+          <a:noFill/>
+        </p:spPr>
+        <p:txBody>
+          <a:bodyPr wrap="square">
+            <a:spAutoFit/>
+          </a:bodyPr>
+          <a:lstStyle/>
+          <a:p>
+            <a:pPr>
+              <a:spcAft>
+                <a:spcPts val="600"/>
+              </a:spcAft>
+            </a:pPr>
+            <a:r>
+              <a:rPr sz="1500">
+                <a:solidFill>
+                  <a:srgbClr val="22282E"/>
+                </a:solidFill>
+              </a:rPr>
+              <a:t>•  ❓ ¿iptables está obsoleto?</a:t>
+            </a:r>
+          </a:p>
+          <a:p>
+            <a:pPr>
+              <a:spcAft>
+                <a:spcPts val="600"/>
+              </a:spcAft>
+            </a:pPr>
+            <a:r>
+              <a:rPr sz="1500">
+                <a:solidFill>
+                  <a:srgbClr val="22282E"/>
+                </a:solidFill>
+              </a:rPr>
+              <a:t>•  Está siendo reemplazado por nftables, que es el framework recomendado. En muchas distros iptables ya es un frontend sobre nftables. Aprende ambos: verás iptables en sistemas heredados.</a:t>
+            </a:r>
+          </a:p>
+          <a:p>
+            <a:pPr>
+              <a:spcAft>
+                <a:spcPts val="600"/>
+              </a:spcAft>
+            </a:pPr>
+            <a:r>
+              <a:rPr sz="1500">
+                <a:solidFill>
+                  <a:srgbClr val="22282E"/>
+                </a:solidFill>
+              </a:rPr>
+              <a:t>•  ❓ ¿Qué es conntrack y por qué importa?</a:t>
+            </a:r>
+          </a:p>
+          <a:p>
+            <a:pPr>
+              <a:spcAft>
+                <a:spcPts val="600"/>
+              </a:spcAft>
+            </a:pPr>
+            <a:r>
+              <a:rPr sz="1500">
+                <a:solidFill>
+                  <a:srgbClr val="22282E"/>
+                </a:solidFill>
+              </a:rPr>
+              <a:t>•  Es el subsistema de seguimiento de conexiones. Permite escribir reglas simples ("permite lo establecido") en lugar de reglas espejo para cada dirección del tráfico.</a:t>
+            </a:r>
+          </a:p>
+          <a:p>
+            <a:pPr>
+              <a:spcAft>
+                <a:spcPts val="600"/>
+              </a:spcAft>
+            </a:pPr>
+            <a:r>
+              <a:rPr sz="1500">
+                <a:solidFill>
+                  <a:srgbClr val="22282E"/>
+                </a:solidFill>
+              </a:rPr>
+              <a:t>•  ❓ ¿Dónde va la política por defecto?</a:t>
+            </a:r>
+          </a:p>
+          <a:p>
+            <a:pPr>
+              <a:spcAft>
+                <a:spcPts val="600"/>
+              </a:spcAft>
+            </a:pPr>
+            <a:r>
+              <a:rPr sz="1500">
+                <a:solidFill>
+                  <a:srgbClr val="22282E"/>
+                </a:solidFill>
+              </a:rPr>
+              <a:t>•  Al final. Primero los ACCEPT específicos y las reglas de established; la última palabra es DROP para todo lo no permitido.</a:t>
+            </a:r>
+          </a:p>
+          <a:p>
+            <a:pPr>
+              <a:spcAft>
+                <a:spcPts val="600"/>
+              </a:spcAft>
+            </a:pPr>
+            <a:r>
+              <a:rPr sz="1500">
+                <a:solidFill>
+                  <a:srgbClr val="22282E"/>
+                </a:solidFill>
+              </a:rPr>
+              <a:t>•  ❓ ¿Un firewall de host reemplaza al perimetral?</a:t>
+            </a:r>
+          </a:p>
+        </p:txBody>
+      </p:sp>
+    </p:spTree>
+  </p:cSld>
+  <p:clrMapOvr>
+    <a:masterClrMapping/>
+  </p:clrMapOvr>
+</p:sld>
+</file>
+
+<file path=ppt/slides/slide15.xml><?xml version="1.0" encoding="utf-8"?>
+<p:sld xmlns:a="http://schemas.openxmlformats.org/drawingml/2006/main" xmlns:p="http://schemas.openxmlformats.org/presentationml/2006/main" xmlns:r="http://schemas.openxmlformats.org/officeDocument/2006/relationships">
+  <p:cSld>
+    <p:spTree>
+      <p:nvGrpSpPr>
+        <p:cNvPr id="1" name=""/>
+        <p:cNvGrpSpPr/>
+        <p:nvPr/>
+      </p:nvGrpSpPr>
+      <p:grpSpPr/>
+      <p:sp>
+        <p:nvSpPr>
+          <p:cNvPr id="2" name="TextBox 1"/>
+          <p:cNvSpPr txBox="1"/>
+          <p:nvPr/>
+        </p:nvSpPr>
+        <p:spPr>
+          <a:xfrm>
+            <a:off x="457200" y="320040"/>
+            <a:ext cx="8229600" cy="822960"/>
+          </a:xfrm>
+          <a:prstGeom prst="rect">
+            <a:avLst/>
+          </a:prstGeom>
+          <a:noFill/>
+        </p:spPr>
+        <p:txBody>
+          <a:bodyPr wrap="square">
+            <a:spAutoFit/>
+          </a:bodyPr>
+          <a:lstStyle/>
+          <a:p>
+            <a:r>
+              <a:rPr sz="2600" b="1">
+                <a:solidFill>
+                  <a:srgbClr val="0B3D2E"/>
+                </a:solidFill>
+              </a:rPr>
+              <a:t>🔗 Referencias</a:t>
+            </a:r>
+          </a:p>
+        </p:txBody>
+      </p:sp>
+      <p:sp>
+        <p:nvSpPr>
+          <p:cNvPr id="3" name="TextBox 2"/>
+          <p:cNvSpPr txBox="1"/>
+          <p:nvPr/>
+        </p:nvSpPr>
+        <p:spPr>
+          <a:xfrm>
+            <a:off x="457200" y="1280160"/>
+            <a:ext cx="8229600" cy="4937760"/>
+          </a:xfrm>
+          <a:prstGeom prst="rect">
+            <a:avLst/>
+          </a:prstGeom>
+          <a:noFill/>
+        </p:spPr>
+        <p:txBody>
+          <a:bodyPr wrap="square">
+            <a:spAutoFit/>
+          </a:bodyPr>
+          <a:lstStyle/>
+          <a:p>
+            <a:pPr>
+              <a:spcAft>
+                <a:spcPts val="600"/>
+              </a:spcAft>
+            </a:pPr>
+            <a:r>
+              <a:rPr sz="1500">
+                <a:solidFill>
+                  <a:srgbClr val="22282E"/>
+                </a:solidFill>
+              </a:rPr>
               <a:t>•  netfilter/iptables project. &lt;https://www.netfilter.org/&gt;</a:t>
             </a:r>
           </a:p>
@@ -3719,6 +4005,81 @@
           </a:p>
         </p:txBody>
       </p:sp>
+    </p:spTree>
+  </p:cSld>
+  <p:clrMapOvr>
+    <a:masterClrMapping/>
+  </p:clrMapOvr>
+</p:sld>
+</file>
+
+<file path=ppt/slides/slide16.xml><?xml version="1.0" encoding="utf-8"?>
+<p:sld xmlns:a="http://schemas.openxmlformats.org/drawingml/2006/main" xmlns:p="http://schemas.openxmlformats.org/presentationml/2006/main" xmlns:r="http://schemas.openxmlformats.org/officeDocument/2006/relationships">
+  <p:cSld>
+    <p:spTree>
+      <p:nvGrpSpPr>
+        <p:cNvPr id="1" name=""/>
+        <p:cNvGrpSpPr/>
+        <p:nvPr/>
+      </p:nvGrpSpPr>
+      <p:grpSpPr/>
+      <p:sp>
+        <p:nvSpPr>
+          <p:cNvPr id="2" name="TextBox 1"/>
+          <p:cNvSpPr txBox="1"/>
+          <p:nvPr/>
+        </p:nvSpPr>
+        <p:spPr>
+          <a:xfrm>
+            <a:off x="457200" y="274320"/>
+            <a:ext cx="8229600" cy="640080"/>
+          </a:xfrm>
+          <a:prstGeom prst="rect">
+            <a:avLst/>
+          </a:prstGeom>
+          <a:noFill/>
+        </p:spPr>
+        <p:txBody>
+          <a:bodyPr wrap="square">
+            <a:spAutoFit/>
+          </a:bodyPr>
+          <a:lstStyle/>
+          <a:p>
+            <a:r>
+              <a:rPr sz="2200" b="1">
+                <a:solidFill>
+                  <a:srgbClr val="0B3D2E"/>
+                </a:solidFill>
+              </a:rPr>
+              <a:t>Diagrama de la clase</a:t>
+            </a:r>
+          </a:p>
+        </p:txBody>
+      </p:sp>
+      <p:pic>
+        <p:nvPicPr>
+          <p:cNvPr id="3" name="Picture 2" descr="eb82eb32bf5b9f7b.png"/>
+          <p:cNvPicPr>
+            <a:picLocks noChangeAspect="1"/>
+          </p:cNvPicPr>
+          <p:nvPr/>
+        </p:nvPicPr>
+        <p:blipFill>
+          <a:blip r:embed="rId2"/>
+          <a:stretch>
+            <a:fillRect/>
+          </a:stretch>
+        </p:blipFill>
+        <p:spPr>
+          <a:xfrm>
+            <a:off x="1554827" y="1097280"/>
+            <a:ext cx="6034346" cy="5303520"/>
+          </a:xfrm>
+          <a:prstGeom prst="rect">
+            <a:avLst/>
+          </a:prstGeom>
+        </p:spPr>
+      </p:pic>
     </p:spTree>
   </p:cSld>
   <p:clrMapOvr>
@@ -3803,7 +4164,7 @@
                   <a:srgbClr val="22282E"/>
                 </a:solidFill>
               </a:rPr>
-              <a:t>•  Entender los tipos de firewall (sin estado, con estado, de aplicación) y construir conjuntos de reglas reales en Linux con iptables y su sucesor nftables. El alumno aprenderá a filtrar tráfico por defecto-denegar, permitir servicios concretos, hacer seguimiento de conexiones y a persistir y auditar las reglas.</a:t>
+              <a:t>•  Entender los tipos de firewall (sin estado, con estado, de aplicación) y construir conjuntos de reglas reales en Linux con iptables y su sucesor nftables. El alumno aprenderá a filtrar tráfico por…</a:t>
             </a:r>
           </a:p>
         </p:txBody>
@@ -4212,7 +4573,7 @@
                   <a:srgbClr val="0B3D2E"/>
                 </a:solidFill>
               </a:rPr>
-              <a:t>📖 Definiciones y características</a:t>
+              <a:t>🧠 Explicación en profundidad</a:t>
             </a:r>
           </a:p>
         </p:txBody>
@@ -4250,82 +4611,97 @@
                   <a:srgbClr val="22282E"/>
                 </a:solidFill>
               </a:rPr>
-              <a:t>•  Firewall sin estado: filtra cada paquete de forma aislada según cabeceras; simple pero incapaz de relacionar paquetes de una misma conexión.</a:t>
-            </a:r>
-          </a:p>
-          <a:p>
-            <a:pPr>
-              <a:spcAft>
-                <a:spcPts val="600"/>
-              </a:spcAft>
-            </a:pPr>
-            <a:r>
-              <a:rPr sz="1500">
-                <a:solidFill>
-                  <a:srgbClr val="22282E"/>
-                </a:solidFill>
-              </a:rPr>
-              <a:t>•  Firewall con estado (stateful): mantiene una tabla de conexiones (conntrack) y decide en función del estado (NEW, ESTABLISHED, RELATED); es el estándar actual.</a:t>
-            </a:r>
-          </a:p>
-          <a:p>
-            <a:pPr>
-              <a:spcAft>
-                <a:spcPts val="600"/>
-              </a:spcAft>
-            </a:pPr>
-            <a:r>
-              <a:rPr sz="1500">
-                <a:solidFill>
-                  <a:srgbClr val="22282E"/>
-                </a:solidFill>
-              </a:rPr>
-              <a:t>•  Firewall de aplicación (proxy/WAF): inspecciona la capa 7; entiende HTTP, SQL, etc. y filtra por contenido.</a:t>
-            </a:r>
-          </a:p>
-          <a:p>
-            <a:pPr>
-              <a:spcAft>
-                <a:spcPts val="600"/>
-              </a:spcAft>
-            </a:pPr>
-            <a:r>
-              <a:rPr sz="1500">
-                <a:solidFill>
-                  <a:srgbClr val="22282E"/>
-                </a:solidFill>
-              </a:rPr>
-              <a:t>•  Cadena (chain): lista ordenada de reglas asociada a un hook de netfilter (INPUT, OUTPUT, FORWARD).</a:t>
-            </a:r>
-          </a:p>
-          <a:p>
-            <a:pPr>
-              <a:spcAft>
-                <a:spcPts val="600"/>
-              </a:spcAft>
-            </a:pPr>
-            <a:r>
-              <a:rPr sz="1500">
-                <a:solidFill>
-                  <a:srgbClr val="22282E"/>
-                </a:solidFill>
-              </a:rPr>
-              <a:t>•  Política por defecto: acción cuando ninguna regla coincide. La postura segura es DROP en INPUT/FORWARD.</a:t>
-            </a:r>
-          </a:p>
-          <a:p>
-            <a:pPr>
-              <a:spcAft>
-                <a:spcPts val="600"/>
-              </a:spcAft>
-            </a:pPr>
-            <a:r>
-              <a:rPr sz="1500">
-                <a:solidFill>
-                  <a:srgbClr val="22282E"/>
-                </a:solidFill>
-              </a:rPr>
-              <a:t>•  nftables: framework moderno del kernel que reemplaza iptables/ip6tables/arptables/ebtables con una sintaxis unificada y mejor rendimiento.</a:t>
+              <a:t>•  Un firewall sin estado juzga cada paquete por separado: mira direcciones, puertos y</a:t>
+            </a:r>
+          </a:p>
+          <a:p>
+            <a:pPr>
+              <a:spcAft>
+                <a:spcPts val="600"/>
+              </a:spcAft>
+            </a:pPr>
+            <a:r>
+              <a:rPr sz="1500">
+                <a:solidFill>
+                  <a:srgbClr val="22282E"/>
+                </a:solidFill>
+              </a:rPr>
+              <a:t>•  flags, y decide. Suena razonable hasta que intentas escribir una regla para "permitir</a:t>
+            </a:r>
+          </a:p>
+          <a:p>
+            <a:pPr>
+              <a:spcAft>
+                <a:spcPts val="600"/>
+              </a:spcAft>
+            </a:pPr>
+            <a:r>
+              <a:rPr sz="1500">
+                <a:solidFill>
+                  <a:srgbClr val="22282E"/>
+                </a:solidFill>
+              </a:rPr>
+              <a:t>•  que mis usuarios naveguen". Sin estado necesitas dos reglas —salida al 443 y entrada</a:t>
+            </a:r>
+          </a:p>
+          <a:p>
+            <a:pPr>
+              <a:spcAft>
+                <a:spcPts val="600"/>
+              </a:spcAft>
+            </a:pPr>
+            <a:r>
+              <a:rPr sz="1500">
+                <a:solidFill>
+                  <a:srgbClr val="22282E"/>
+                </a:solidFill>
+              </a:rPr>
+              <a:t>•  desde el 443— y esa segunda regla abre un agujero enorme, porque cualquier atacante que</a:t>
+            </a:r>
+          </a:p>
+          <a:p>
+            <a:pPr>
+              <a:spcAft>
+                <a:spcPts val="600"/>
+              </a:spcAft>
+            </a:pPr>
+            <a:r>
+              <a:rPr sz="1500">
+                <a:solidFill>
+                  <a:srgbClr val="22282E"/>
+                </a:solidFill>
+              </a:rPr>
+              <a:t>•  ponga el 443 como puerto de origen atraviesa tu filtro. Un firewall con estado en</a:t>
+            </a:r>
+          </a:p>
+          <a:p>
+            <a:pPr>
+              <a:spcAft>
+                <a:spcPts val="600"/>
+              </a:spcAft>
+            </a:pPr>
+            <a:r>
+              <a:rPr sz="1500">
+                <a:solidFill>
+                  <a:srgbClr val="22282E"/>
+                </a:solidFill>
+              </a:rPr>
+              <a:t>•  cambio recuerda las conexiones que ha visto nacer, y por eso puede expresar la</a:t>
+            </a:r>
+          </a:p>
+          <a:p>
+            <a:pPr>
+              <a:spcAft>
+                <a:spcPts val="600"/>
+              </a:spcAft>
+            </a:pPr>
+            <a:r>
+              <a:rPr sz="1500">
+                <a:solidFill>
+                  <a:srgbClr val="22282E"/>
+                </a:solidFill>
+              </a:rPr>
+              <a:t>•  intención real: "permite lo que salga y lo que sea respuesta a algo que salió".</a:t>
             </a:r>
           </a:p>
         </p:txBody>
@@ -4376,7 +4752,7 @@
                   <a:srgbClr val="0B3D2E"/>
                 </a:solidFill>
               </a:rPr>
-              <a:t>🧰 Herramientas y preparación</a:t>
+              <a:t>📖 Definiciones y características</a:t>
             </a:r>
           </a:p>
         </p:txBody>
@@ -4414,52 +4790,82 @@
                   <a:srgbClr val="22282E"/>
                 </a:solidFill>
               </a:rPr>
-              <a:t>•  iptables y nftables: sudo apt install iptables nftables.</a:t>
-            </a:r>
-          </a:p>
-          <a:p>
-            <a:pPr>
-              <a:spcAft>
-                <a:spcPts val="600"/>
-              </a:spcAft>
-            </a:pPr>
-            <a:r>
-              <a:rPr sz="1500">
-                <a:solidFill>
-                  <a:srgbClr val="22282E"/>
-                </a:solidFill>
-              </a:rPr>
-              <a:t>•  conntrack-tools para inspeccionar conexiones: sudo apt install conntrack.</a:t>
-            </a:r>
-          </a:p>
-          <a:p>
-            <a:pPr>
-              <a:spcAft>
-                <a:spcPts val="600"/>
-              </a:spcAft>
-            </a:pPr>
-            <a:r>
-              <a:rPr sz="1500">
-                <a:solidFill>
-                  <a:srgbClr val="22282E"/>
-                </a:solidFill>
-              </a:rPr>
-              <a:t>•  Persistencia: iptables-persistent (Debian/Ubuntu) o servicio nftables.</a:t>
-            </a:r>
-          </a:p>
-          <a:p>
-            <a:pPr>
-              <a:spcAft>
-                <a:spcPts val="600"/>
-              </a:spcAft>
-            </a:pPr>
-            <a:r>
-              <a:rPr sz="1500">
-                <a:solidFill>
-                  <a:srgbClr val="22282E"/>
-                </a:solidFill>
-              </a:rPr>
-              <a:t>•  Practica en una VM: una regla mal hecha puede dejarte sin SSH.</a:t>
+              <a:t>•  Firewall sin estado: filtra cada paquete de forma aislada según cabeceras; simple pero incapaz de relacionar paquetes de una misma conexión.</a:t>
+            </a:r>
+          </a:p>
+          <a:p>
+            <a:pPr>
+              <a:spcAft>
+                <a:spcPts val="600"/>
+              </a:spcAft>
+            </a:pPr>
+            <a:r>
+              <a:rPr sz="1500">
+                <a:solidFill>
+                  <a:srgbClr val="22282E"/>
+                </a:solidFill>
+              </a:rPr>
+              <a:t>•  Firewall con estado (stateful): mantiene una tabla de conexiones (conntrack) y decide en función del estado (NEW, ESTABLISHED, RELATED); es el estándar actual.</a:t>
+            </a:r>
+          </a:p>
+          <a:p>
+            <a:pPr>
+              <a:spcAft>
+                <a:spcPts val="600"/>
+              </a:spcAft>
+            </a:pPr>
+            <a:r>
+              <a:rPr sz="1500">
+                <a:solidFill>
+                  <a:srgbClr val="22282E"/>
+                </a:solidFill>
+              </a:rPr>
+              <a:t>•  Firewall de aplicación (proxy/WAF): inspecciona la capa 7; entiende HTTP, SQL, etc. y filtra por contenido.</a:t>
+            </a:r>
+          </a:p>
+          <a:p>
+            <a:pPr>
+              <a:spcAft>
+                <a:spcPts val="600"/>
+              </a:spcAft>
+            </a:pPr>
+            <a:r>
+              <a:rPr sz="1500">
+                <a:solidFill>
+                  <a:srgbClr val="22282E"/>
+                </a:solidFill>
+              </a:rPr>
+              <a:t>•  Cadena (chain): lista ordenada de reglas asociada a un hook de netfilter (INPUT, OUTPUT, FORWARD).</a:t>
+            </a:r>
+          </a:p>
+          <a:p>
+            <a:pPr>
+              <a:spcAft>
+                <a:spcPts val="600"/>
+              </a:spcAft>
+            </a:pPr>
+            <a:r>
+              <a:rPr sz="1500">
+                <a:solidFill>
+                  <a:srgbClr val="22282E"/>
+                </a:solidFill>
+              </a:rPr>
+              <a:t>•  Política por defecto: acción cuando ninguna regla coincide. La postura segura es DROP en INPUT/FORWARD.</a:t>
+            </a:r>
+          </a:p>
+          <a:p>
+            <a:pPr>
+              <a:spcAft>
+                <a:spcPts val="600"/>
+              </a:spcAft>
+            </a:pPr>
+            <a:r>
+              <a:rPr sz="1500">
+                <a:solidFill>
+                  <a:srgbClr val="22282E"/>
+                </a:solidFill>
+              </a:rPr>
+              <a:t>•  nftables: framework moderno del kernel que reemplaza iptables/ip6tables/arptables/ebtables con una sintaxis unificada y mejor rendimiento.</a:t>
             </a:r>
           </a:p>
         </p:txBody>
@@ -4510,7 +4916,7 @@
                   <a:srgbClr val="0B3D2E"/>
                 </a:solidFill>
               </a:rPr>
-              <a:t>🧪 Laboratorio guiado — iptables</a:t>
+              <a:t>📔 Glosario</a:t>
             </a:r>
           </a:p>
         </p:txBody>
@@ -4548,97 +4954,97 @@
                   <a:srgbClr val="22282E"/>
                 </a:solidFill>
               </a:rPr>
-              <a:t>•  Ver reglas actuales:</a:t>
-            </a:r>
-          </a:p>
-          <a:p>
-            <a:pPr>
-              <a:spcAft>
-                <a:spcPts val="600"/>
-              </a:spcAft>
-            </a:pPr>
-            <a:r>
-              <a:rPr sz="1500">
-                <a:solidFill>
-                  <a:srgbClr val="22282E"/>
-                </a:solidFill>
-              </a:rPr>
-              <a:t>•  sudo iptables -L -n -v</a:t>
-            </a:r>
-          </a:p>
-          <a:p>
-            <a:pPr>
-              <a:spcAft>
-                <a:spcPts val="600"/>
-              </a:spcAft>
-            </a:pPr>
-            <a:r>
-              <a:rPr sz="1500">
-                <a:solidFill>
-                  <a:srgbClr val="22282E"/>
-                </a:solidFill>
-              </a:rPr>
-              <a:t>•  Permitir loopback y conexiones establecidas (siempre primero):</a:t>
-            </a:r>
-          </a:p>
-          <a:p>
-            <a:pPr>
-              <a:spcAft>
-                <a:spcPts val="600"/>
-              </a:spcAft>
-            </a:pPr>
-            <a:r>
-              <a:rPr sz="1500">
-                <a:solidFill>
-                  <a:srgbClr val="22282E"/>
-                </a:solidFill>
-              </a:rPr>
-              <a:t>•  sudo iptables -A INPUT -i lo -j ACCEPT</a:t>
-            </a:r>
-          </a:p>
-          <a:p>
-            <a:pPr>
-              <a:spcAft>
-                <a:spcPts val="600"/>
-              </a:spcAft>
-            </a:pPr>
-            <a:r>
-              <a:rPr sz="1500">
-                <a:solidFill>
-                  <a:srgbClr val="22282E"/>
-                </a:solidFill>
-              </a:rPr>
-              <a:t>•  sudo iptables -A INPUT -m conntrack --ctstate ESTABLISHED,RELATED -j ACCEPT</a:t>
-            </a:r>
-          </a:p>
-          <a:p>
-            <a:pPr>
-              <a:spcAft>
-                <a:spcPts val="600"/>
-              </a:spcAft>
-            </a:pPr>
-            <a:r>
-              <a:rPr sz="1500">
-                <a:solidFill>
-                  <a:srgbClr val="22282E"/>
-                </a:solidFill>
-              </a:rPr>
-              <a:t>•  Permitir SSH y HTTP entrantes:</a:t>
-            </a:r>
-          </a:p>
-          <a:p>
-            <a:pPr>
-              <a:spcAft>
-                <a:spcPts val="600"/>
-              </a:spcAft>
-            </a:pPr>
-            <a:r>
-              <a:rPr sz="1500">
-                <a:solidFill>
-                  <a:srgbClr val="22282E"/>
-                </a:solidFill>
-              </a:rPr>
-              <a:t>•  sudo iptables -A INPUT -p tcp --dport 22 -m conntrack --ctstate NEW -j ACCEPT</a:t>
+              <a:t>•  Término — Definición concisa</a:t>
+            </a:r>
+          </a:p>
+          <a:p>
+            <a:pPr>
+              <a:spcAft>
+                <a:spcPts val="600"/>
+              </a:spcAft>
+            </a:pPr>
+            <a:r>
+              <a:rPr sz="1500">
+                <a:solidFill>
+                  <a:srgbClr val="22282E"/>
+                </a:solidFill>
+              </a:rPr>
+              <a:t>•  Firewall sin estado — Juzga cada paquete de forma aislada; exige reglas de vuelta inseguras</a:t>
+            </a:r>
+          </a:p>
+          <a:p>
+            <a:pPr>
+              <a:spcAft>
+                <a:spcPts val="600"/>
+              </a:spcAft>
+            </a:pPr>
+            <a:r>
+              <a:rPr sz="1500">
+                <a:solidFill>
+                  <a:srgbClr val="22282E"/>
+                </a:solidFill>
+              </a:rPr>
+              <a:t>•  Firewall con estado — Recuerda las conexiones vistas y permite sus respuestas</a:t>
+            </a:r>
+          </a:p>
+          <a:p>
+            <a:pPr>
+              <a:spcAft>
+                <a:spcPts val="600"/>
+              </a:spcAft>
+            </a:pPr>
+            <a:r>
+              <a:rPr sz="1500">
+                <a:solidFill>
+                  <a:srgbClr val="22282E"/>
+                </a:solidFill>
+              </a:rPr>
+              <a:t>•  conntrack — Subsistema del kernel Linux que sigue el estado de las conexiones</a:t>
+            </a:r>
+          </a:p>
+          <a:p>
+            <a:pPr>
+              <a:spcAft>
+                <a:spcPts val="600"/>
+              </a:spcAft>
+            </a:pPr>
+            <a:r>
+              <a:rPr sz="1500">
+                <a:solidFill>
+                  <a:srgbClr val="22282E"/>
+                </a:solidFill>
+              </a:rPr>
+              <a:t>•  NEW — Paquete que inicia una conexión nueva</a:t>
+            </a:r>
+          </a:p>
+          <a:p>
+            <a:pPr>
+              <a:spcAft>
+                <a:spcPts val="600"/>
+              </a:spcAft>
+            </a:pPr>
+            <a:r>
+              <a:rPr sz="1500">
+                <a:solidFill>
+                  <a:srgbClr val="22282E"/>
+                </a:solidFill>
+              </a:rPr>
+              <a:t>•  ESTABLISHED — Paquete perteneciente a una conexión ya aceptada</a:t>
+            </a:r>
+          </a:p>
+          <a:p>
+            <a:pPr>
+              <a:spcAft>
+                <a:spcPts val="600"/>
+              </a:spcAft>
+            </a:pPr>
+            <a:r>
+              <a:rPr sz="1500">
+                <a:solidFill>
+                  <a:srgbClr val="22282E"/>
+                </a:solidFill>
+              </a:rPr>
+              <a:t>•  RELATED — Tráfico asociado a otra conexión (datos de FTP, ICMP correspondiente)</a:t>
             </a:r>
           </a:p>
         </p:txBody>
@@ -4689,7 +5095,7 @@
                   <a:srgbClr val="0B3D2E"/>
                 </a:solidFill>
               </a:rPr>
-              <a:t>🧪 Laboratorio guiado — nftables</a:t>
+              <a:t>🧰 Herramientas y preparación</a:t>
             </a:r>
           </a:p>
         </p:txBody>
@@ -4727,97 +5133,52 @@
                   <a:srgbClr val="22282E"/>
                 </a:solidFill>
               </a:rPr>
-              <a:t>•  Crear tabla y cadena con política drop:</a:t>
-            </a:r>
-          </a:p>
-          <a:p>
-            <a:pPr>
-              <a:spcAft>
-                <a:spcPts val="600"/>
-              </a:spcAft>
-            </a:pPr>
-            <a:r>
-              <a:rPr sz="1500">
-                <a:solidFill>
-                  <a:srgbClr val="22282E"/>
-                </a:solidFill>
-              </a:rPr>
-              <a:t>•  sudo nft add table inet filtro</a:t>
-            </a:r>
-          </a:p>
-          <a:p>
-            <a:pPr>
-              <a:spcAft>
-                <a:spcPts val="600"/>
-              </a:spcAft>
-            </a:pPr>
-            <a:r>
-              <a:rPr sz="1500">
-                <a:solidFill>
-                  <a:srgbClr val="22282E"/>
-                </a:solidFill>
-              </a:rPr>
-              <a:t>•  sudo nft add chain inet filtro entrada '{ type filter hook input priority 0; policy drop; }'</a:t>
-            </a:r>
-          </a:p>
-          <a:p>
-            <a:pPr>
-              <a:spcAft>
-                <a:spcPts val="600"/>
-              </a:spcAft>
-            </a:pPr>
-            <a:r>
-              <a:rPr sz="1500">
-                <a:solidFill>
-                  <a:srgbClr val="22282E"/>
-                </a:solidFill>
-              </a:rPr>
-              <a:t>•  Reglas equivalentes:</a:t>
-            </a:r>
-          </a:p>
-          <a:p>
-            <a:pPr>
-              <a:spcAft>
-                <a:spcPts val="600"/>
-              </a:spcAft>
-            </a:pPr>
-            <a:r>
-              <a:rPr sz="1500">
-                <a:solidFill>
-                  <a:srgbClr val="22282E"/>
-                </a:solidFill>
-              </a:rPr>
-              <a:t>•  sudo nft add rule inet filtro entrada iif lo accept</a:t>
-            </a:r>
-          </a:p>
-          <a:p>
-            <a:pPr>
-              <a:spcAft>
-                <a:spcPts val="600"/>
-              </a:spcAft>
-            </a:pPr>
-            <a:r>
-              <a:rPr sz="1500">
-                <a:solidFill>
-                  <a:srgbClr val="22282E"/>
-                </a:solidFill>
-              </a:rPr>
-              <a:t>•  sudo nft add rule inet filtro entrada ct state established,related accept</a:t>
-            </a:r>
-          </a:p>
-          <a:p>
-            <a:pPr>
-              <a:spcAft>
-                <a:spcPts val="600"/>
-              </a:spcAft>
-            </a:pPr>
-            <a:r>
-              <a:rPr sz="1500">
-                <a:solidFill>
-                  <a:srgbClr val="22282E"/>
-                </a:solidFill>
-              </a:rPr>
-              <a:t>•  sudo nft add rule inet filtro entrada tcp dport {22, 80} ct state new accept</a:t>
+              <a:t>•  iptables y nftables: sudo apt install iptables nftables.</a:t>
+            </a:r>
+          </a:p>
+          <a:p>
+            <a:pPr>
+              <a:spcAft>
+                <a:spcPts val="600"/>
+              </a:spcAft>
+            </a:pPr>
+            <a:r>
+              <a:rPr sz="1500">
+                <a:solidFill>
+                  <a:srgbClr val="22282E"/>
+                </a:solidFill>
+              </a:rPr>
+              <a:t>•  conntrack-tools para inspeccionar conexiones: sudo apt install conntrack.</a:t>
+            </a:r>
+          </a:p>
+          <a:p>
+            <a:pPr>
+              <a:spcAft>
+                <a:spcPts val="600"/>
+              </a:spcAft>
+            </a:pPr>
+            <a:r>
+              <a:rPr sz="1500">
+                <a:solidFill>
+                  <a:srgbClr val="22282E"/>
+                </a:solidFill>
+              </a:rPr>
+              <a:t>•  Persistencia: iptables-persistent (Debian/Ubuntu) o servicio nftables.</a:t>
+            </a:r>
+          </a:p>
+          <a:p>
+            <a:pPr>
+              <a:spcAft>
+                <a:spcPts val="600"/>
+              </a:spcAft>
+            </a:pPr>
+            <a:r>
+              <a:rPr sz="1500">
+                <a:solidFill>
+                  <a:srgbClr val="22282E"/>
+                </a:solidFill>
+              </a:rPr>
+              <a:t>•  Practica en una VM: una regla mal hecha puede dejarte sin SSH.</a:t>
             </a:r>
           </a:p>
         </p:txBody>
@@ -4868,7 +5229,7 @@
                   <a:srgbClr val="0B3D2E"/>
                 </a:solidFill>
               </a:rPr>
-              <a:t>✍️ Ejercicios</a:t>
+              <a:t>🧪 Laboratorio guiado — iptables</a:t>
             </a:r>
           </a:p>
         </p:txBody>
@@ -4906,82 +5267,82 @@
                   <a:srgbClr val="22282E"/>
                 </a:solidFill>
               </a:rPr>
-              <a:t>•  Escribe una política por defecto-denegar que solo permita SSH desde una subred concreta (-s 192.168.56.0/24).</a:t>
-            </a:r>
-          </a:p>
-          <a:p>
-            <a:pPr>
-              <a:spcAft>
-                <a:spcPts val="600"/>
-              </a:spcAft>
-            </a:pPr>
-            <a:r>
-              <a:rPr sz="1500">
-                <a:solidFill>
-                  <a:srgbClr val="22282E"/>
-                </a:solidFill>
-              </a:rPr>
-              <a:t>•  Añade una regla que limite la tasa de nuevas conexiones SSH (-m limit o ct count) para mitigar fuerza bruta.</a:t>
-            </a:r>
-          </a:p>
-          <a:p>
-            <a:pPr>
-              <a:spcAft>
-                <a:spcPts val="600"/>
-              </a:spcAft>
-            </a:pPr>
-            <a:r>
-              <a:rPr sz="1500">
-                <a:solidFill>
-                  <a:srgbClr val="22282E"/>
-                </a:solidFill>
-              </a:rPr>
-              <a:t>•  Traduce tu conjunto de reglas de iptables a nftables y verifica que se comportan igual.</a:t>
-            </a:r>
-          </a:p>
-          <a:p>
-            <a:pPr>
-              <a:spcAft>
-                <a:spcPts val="600"/>
-              </a:spcAft>
-            </a:pPr>
-            <a:r>
-              <a:rPr sz="1500">
-                <a:solidFill>
-                  <a:srgbClr val="22282E"/>
-                </a:solidFill>
-              </a:rPr>
-              <a:t>•  Configura logging solo para paquetes denegados y localiza las entradas en journalctl -k.</a:t>
-            </a:r>
-          </a:p>
-          <a:p>
-            <a:pPr>
-              <a:spcAft>
-                <a:spcPts val="600"/>
-              </a:spcAft>
-            </a:pPr>
-            <a:r>
-              <a:rPr sz="1500">
-                <a:solidFill>
-                  <a:srgbClr val="22282E"/>
-                </a:solidFill>
-              </a:rPr>
-              <a:t>•  Bloquea todo el tráfico saliente salvo DNS y HTTP/HTTPS (política OUTPUT restrictiva).</a:t>
-            </a:r>
-          </a:p>
-          <a:p>
-            <a:pPr>
-              <a:spcAft>
-                <a:spcPts val="600"/>
-              </a:spcAft>
-            </a:pPr>
-            <a:r>
-              <a:rPr sz="1500">
-                <a:solidFill>
-                  <a:srgbClr val="22282E"/>
-                </a:solidFill>
-              </a:rPr>
-              <a:t>•  Usa conntrack -E para observar en vivo la creación y cierre de conexiones.</a:t>
+              <a:t>•  Ver reglas actuales:</a:t>
+            </a:r>
+          </a:p>
+          <a:p>
+            <a:pPr>
+              <a:spcAft>
+                <a:spcPts val="600"/>
+              </a:spcAft>
+            </a:pPr>
+            <a:r>
+              <a:rPr sz="1500">
+                <a:solidFill>
+                  <a:srgbClr val="22282E"/>
+                </a:solidFill>
+              </a:rPr>
+              <a:t>•  Permitir loopback y conexiones establecidas (siempre primero):</a:t>
+            </a:r>
+          </a:p>
+          <a:p>
+            <a:pPr>
+              <a:spcAft>
+                <a:spcPts val="600"/>
+              </a:spcAft>
+            </a:pPr>
+            <a:r>
+              <a:rPr sz="1500">
+                <a:solidFill>
+                  <a:srgbClr val="22282E"/>
+                </a:solidFill>
+              </a:rPr>
+              <a:t>•  Permitir SSH y HTTP entrantes:</a:t>
+            </a:r>
+          </a:p>
+          <a:p>
+            <a:pPr>
+              <a:spcAft>
+                <a:spcPts val="600"/>
+              </a:spcAft>
+            </a:pPr>
+            <a:r>
+              <a:rPr sz="1500">
+                <a:solidFill>
+                  <a:srgbClr val="22282E"/>
+                </a:solidFill>
+              </a:rPr>
+              <a:t>•  Registrar y denegar el resto:</a:t>
+            </a:r>
+          </a:p>
+          <a:p>
+            <a:pPr>
+              <a:spcAft>
+                <a:spcPts val="600"/>
+              </a:spcAft>
+            </a:pPr>
+            <a:r>
+              <a:rPr sz="1500">
+                <a:solidFill>
+                  <a:srgbClr val="22282E"/>
+                </a:solidFill>
+              </a:rPr>
+              <a:t>•  Inspecciona conexiones:</a:t>
+            </a:r>
+          </a:p>
+          <a:p>
+            <a:pPr>
+              <a:spcAft>
+                <a:spcPts val="600"/>
+              </a:spcAft>
+            </a:pPr>
+            <a:r>
+              <a:rPr sz="1500">
+                <a:solidFill>
+                  <a:srgbClr val="22282E"/>
+                </a:solidFill>
+              </a:rPr>
+              <a:t>•  Persistir:</a:t>
             </a:r>
           </a:p>
         </p:txBody>
